--- a/design/ppt/dist/ggc-presentation-sample.pptx
+++ b/design/ppt/dist/ggc-presentation-sample.pptx
@@ -3815,7 +3815,7 @@
           </a:solidFill>
           <a:ln w="9525">
             <a:solidFill>
-              <a:srgbClr val="E6EBF1"/>
+              <a:srgbClr val="D5DCE5"/>
             </a:solidFill>
           </a:ln>
           <a:effectLst/>
@@ -3984,7 +3984,7 @@
           </a:solidFill>
           <a:ln w="9525">
             <a:solidFill>
-              <a:srgbClr val="E6EBF1"/>
+              <a:srgbClr val="D5DCE5"/>
             </a:solidFill>
           </a:ln>
           <a:effectLst/>
@@ -4153,7 +4153,7 @@
           </a:solidFill>
           <a:ln w="9525">
             <a:solidFill>
-              <a:srgbClr val="E6EBF1"/>
+              <a:srgbClr val="D5DCE5"/>
             </a:solidFill>
           </a:ln>
           <a:effectLst/>
@@ -4322,7 +4322,7 @@
           </a:solidFill>
           <a:ln w="9525">
             <a:solidFill>
-              <a:srgbClr val="E6EBF1"/>
+              <a:srgbClr val="D5DCE5"/>
             </a:solidFill>
           </a:ln>
           <a:effectLst/>
@@ -4568,7 +4568,7 @@
           </a:prstGeom>
           <a:ln w="9525">
             <a:solidFill>
-              <a:srgbClr val="E6EBF1"/>
+              <a:srgbClr val="D5DCE5"/>
             </a:solidFill>
           </a:ln>
         </p:spPr>
@@ -4931,7 +4931,7 @@
           </a:prstGeom>
           <a:ln w="9525">
             <a:solidFill>
-              <a:srgbClr val="E6EBF1"/>
+              <a:srgbClr val="D5DCE5"/>
             </a:solidFill>
           </a:ln>
         </p:spPr>
@@ -5855,7 +5855,7 @@
           </a:prstGeom>
           <a:ln w="9525">
             <a:solidFill>
-              <a:srgbClr val="E6EBF1"/>
+              <a:srgbClr val="D5DCE5"/>
             </a:solidFill>
           </a:ln>
         </p:spPr>
@@ -6602,7 +6602,7 @@
           </a:prstGeom>
           <a:ln w="9525">
             <a:solidFill>
-              <a:srgbClr val="E6EBF1"/>
+              <a:srgbClr val="D5DCE5"/>
             </a:solidFill>
           </a:ln>
         </p:spPr>
@@ -6780,7 +6780,7 @@
           </a:solidFill>
           <a:ln w="9525">
             <a:solidFill>
-              <a:srgbClr val="E6EBF1"/>
+              <a:srgbClr val="D5DCE5"/>
             </a:solidFill>
           </a:ln>
           <a:effectLst/>
@@ -6980,7 +6980,7 @@
           </a:solidFill>
           <a:ln w="9525">
             <a:solidFill>
-              <a:srgbClr val="E6EBF1"/>
+              <a:srgbClr val="D5DCE5"/>
             </a:solidFill>
           </a:ln>
           <a:effectLst/>
@@ -7257,7 +7257,7 @@
           </a:prstGeom>
           <a:ln w="9525">
             <a:solidFill>
-              <a:srgbClr val="E6EBF1"/>
+              <a:srgbClr val="D5DCE5"/>
             </a:solidFill>
           </a:ln>
         </p:spPr>
@@ -7836,7 +7836,7 @@
           </a:prstGeom>
           <a:ln w="9525">
             <a:solidFill>
-              <a:srgbClr val="E6EBF1"/>
+              <a:srgbClr val="D5DCE5"/>
             </a:solidFill>
           </a:ln>
         </p:spPr>
@@ -8285,7 +8285,7 @@
                   </a:txBody>
                   <a:tcPr marL="109728" marR="109728">
                     <a:solidFill>
-                      <a:srgbClr val="EEF1F5"/>
+                      <a:srgbClr val="FFFFFF"/>
                     </a:solidFill>
                   </a:tcPr>
                 </a:tc>
@@ -8309,7 +8309,7 @@
                   </a:txBody>
                   <a:tcPr marL="109728" marR="109728">
                     <a:solidFill>
-                      <a:srgbClr val="EEF1F5"/>
+                      <a:srgbClr val="FFFFFF"/>
                     </a:solidFill>
                   </a:tcPr>
                 </a:tc>
@@ -8333,7 +8333,7 @@
                   </a:txBody>
                   <a:tcPr marL="109728" marR="109728">
                     <a:solidFill>
-                      <a:srgbClr val="EEF1F5"/>
+                      <a:srgbClr val="FFFFFF"/>
                     </a:solidFill>
                   </a:tcPr>
                 </a:tc>
@@ -8357,7 +8357,7 @@
                   </a:txBody>
                   <a:tcPr marL="109728" marR="109728">
                     <a:solidFill>
-                      <a:srgbClr val="EEF1F5"/>
+                      <a:srgbClr val="FFFFFF"/>
                     </a:solidFill>
                   </a:tcPr>
                 </a:tc>
@@ -8381,7 +8381,7 @@
                   </a:txBody>
                   <a:tcPr marL="109728" marR="109728">
                     <a:solidFill>
-                      <a:srgbClr val="EEF1F5"/>
+                      <a:srgbClr val="FFFFFF"/>
                     </a:solidFill>
                   </a:tcPr>
                 </a:tc>
@@ -8529,7 +8529,7 @@
                   </a:txBody>
                   <a:tcPr marL="109728" marR="109728">
                     <a:solidFill>
-                      <a:srgbClr val="EEF1F5"/>
+                      <a:srgbClr val="FFFFFF"/>
                     </a:solidFill>
                   </a:tcPr>
                 </a:tc>
@@ -8553,7 +8553,7 @@
                   </a:txBody>
                   <a:tcPr marL="109728" marR="109728">
                     <a:solidFill>
-                      <a:srgbClr val="EEF1F5"/>
+                      <a:srgbClr val="FFFFFF"/>
                     </a:solidFill>
                   </a:tcPr>
                 </a:tc>
@@ -8577,7 +8577,7 @@
                   </a:txBody>
                   <a:tcPr marL="109728" marR="109728">
                     <a:solidFill>
-                      <a:srgbClr val="EEF1F5"/>
+                      <a:srgbClr val="FFFFFF"/>
                     </a:solidFill>
                   </a:tcPr>
                 </a:tc>
@@ -8601,7 +8601,7 @@
                   </a:txBody>
                   <a:tcPr marL="109728" marR="109728">
                     <a:solidFill>
-                      <a:srgbClr val="EEF1F5"/>
+                      <a:srgbClr val="FFFFFF"/>
                     </a:solidFill>
                   </a:tcPr>
                 </a:tc>
@@ -8625,7 +8625,7 @@
                   </a:txBody>
                   <a:tcPr marL="109728" marR="109728">
                     <a:solidFill>
-                      <a:srgbClr val="EEF1F5"/>
+                      <a:srgbClr val="FFFFFF"/>
                     </a:solidFill>
                   </a:tcPr>
                 </a:tc>
@@ -8974,7 +8974,7 @@
           </a:prstGeom>
           <a:ln w="9525">
             <a:solidFill>
-              <a:srgbClr val="E6EBF1"/>
+              <a:srgbClr val="D5DCE5"/>
             </a:solidFill>
           </a:ln>
         </p:spPr>
@@ -9247,7 +9247,7 @@
           </a:prstGeom>
           <a:ln w="9525">
             <a:solidFill>
-              <a:srgbClr val="E6EBF1"/>
+              <a:srgbClr val="D5DCE5"/>
             </a:solidFill>
           </a:ln>
         </p:spPr>
